--- a/tests/report_generator/integration/reference_itdd-technical-debt.pptx
+++ b/tests/report_generator/integration/reference_itdd-technical-debt.pptx
@@ -20834,7 +20834,7 @@
           <a:p>
             <a:r>
               <a:rPr lang="en-US" dirty="0"/>
-              <a:t>Software Quality report on Twitter Algorithm</a:t>
+              <a:t>Software Quality report on Integrationtest-kafka</a:t>
             </a:r>
             <a:endParaRPr lang="en-US" dirty="0"/>
           </a:p>
@@ -20926,7 +20926,7 @@
           <a:p>
             <a:r>
               <a:rPr lang="en-US" dirty="0" err="1"/>
-              <a:t>March 12, 2026</a:t>
+              <a:t>March 08, 2026</a:t>
             </a:r>
             <a:endParaRPr lang="en-US" dirty="0"/>
           </a:p>
@@ -24454,7 +24454,7 @@
           <a:p>
             <a:r>
               <a:rPr lang="en-US" dirty="0"/>
-              <a:t>Twitter Algorithm technical debt is 39.7 person years (100% of its volume)</a:t>
+              <a:t>Integrationtest-kafka technical debt is 18.2 person years (42% of its volume)</a:t>
             </a:r>
           </a:p>
         </p:txBody>
@@ -24629,7 +24629,7 @@
             </a:pPr>
             <a:r>
               <a:rPr lang="en-US" b="1" dirty="0"/>
-              <a:t>Twitter Algorithm’s code volume totals 39.7 person years of theoretical rebuild volume</a:t>
+              <a:t>Integrationtest-kafka’s code volume totals 43.0 person years of theoretical rebuild volume</a:t>
             </a:r>
           </a:p>
           <a:p>
@@ -24647,7 +24647,7 @@
             </a:r>
             <a:r>
               <a:rPr lang="en-US" sz="1600" dirty="0" err="1"/>
-              <a:t>3.1 stars (★★★☆☆)</a:t>
+              <a:t>2.6 stars (★★★☆☆)</a:t>
             </a:r>
             <a:endParaRPr lang="en-US" dirty="0"/>
           </a:p>
@@ -24666,13 +24666,13 @@
             </a:pPr>
             <a:r>
               <a:rPr lang="en-US" b="1" dirty="0"/>
-              <a:t>6.0 FTE of development effort is recommended for maintenance alone</a:t>
+              <a:t>6.5 FTE of development effort is recommended for maintenance alone</a:t>
             </a:r>
           </a:p>
           <a:p>
             <a:r>
               <a:rPr lang="en-US" dirty="0"/>
-              <a:t>Approximately 39.7 person years is required to renovate the system towards the recommended 4-star level</a:t>
+              <a:t>Approximately 18.2 person years is required to renovate the system towards the recommended 4-star level</a:t>
             </a:r>
           </a:p>
         </p:txBody>
@@ -25090,7 +25090,7 @@
                             <a:schemeClr val="accent1"/>
                           </a:solidFill>
                         </a:rPr>
-                        <a:t>Twitter Algorithm</a:t>
+                        <a:t>Integrationtest-kafka</a:t>
                       </a:r>
                     </a:p>
                   </a:txBody>
@@ -25145,7 +25145,7 @@
                           <a:effectLst/>
                           <a:latin typeface="Calibri Regular"/>
                         </a:rPr>
-                        <a:t>39.7 PY</a:t>
+                        <a:t>43.0 PY</a:t>
                       </a:r>
                       <a:endParaRPr lang="en-US" sz="1400" b="0" i="0" u="none" strike="noStrike" noProof="0" dirty="0">
                         <a:solidFill>
@@ -25276,7 +25276,7 @@
                           <a:effectLst/>
                           <a:latin typeface="Calibri Regular"/>
                         </a:rPr>
-                        <a:t>6.0 FTE</a:t>
+                        <a:t>6.5 FTE</a:t>
                       </a:r>
                     </a:p>
                   </a:txBody>
